--- a/Generalised_Hyperplane_Trees/Searching in Metric Spaces.pptx
+++ b/Generalised_Hyperplane_Trees/Searching in Metric Spaces.pptx
@@ -2,7 +2,7 @@
 <file path=ppt/presentation.xml><?xml version="1.0" encoding="utf-8"?>
 <p:presentation xmlns:a="http://schemas.openxmlformats.org/drawingml/2006/main" xmlns:r="http://schemas.openxmlformats.org/officeDocument/2006/relationships" xmlns:p="http://schemas.openxmlformats.org/presentationml/2006/main" saveSubsetFonts="1">
   <p:sldMasterIdLst>
-    <p:sldMasterId id="2147483660" r:id="rId1"/>
+    <p:sldMasterId id="2147483684" r:id="rId1"/>
   </p:sldMasterIdLst>
   <p:sldIdLst>
     <p:sldId id="256" r:id="rId2"/>
@@ -24,11 +24,9 @@
     <p:sldId id="269" r:id="rId18"/>
     <p:sldId id="270" r:id="rId19"/>
     <p:sldId id="274" r:id="rId20"/>
-    <p:sldId id="275" r:id="rId21"/>
-    <p:sldId id="276" r:id="rId22"/>
-    <p:sldId id="278" r:id="rId23"/>
-    <p:sldId id="277" r:id="rId24"/>
-    <p:sldId id="279" r:id="rId25"/>
+    <p:sldId id="276" r:id="rId21"/>
+    <p:sldId id="278" r:id="rId22"/>
+    <p:sldId id="279" r:id="rId23"/>
   </p:sldIdLst>
   <p:sldSz cx="12192000" cy="6858000"/>
   <p:notesSz cx="6858000" cy="9144000"/>
@@ -266,7 +264,7 @@
           <a:p>
             <a:fld id="{06C50271-0AAB-4C94-A81B-1467CBA4DF2C}" type="datetimeFigureOut">
               <a:rPr lang="en-IN" smtClean="0"/>
-              <a:t>24-11-2025</a:t>
+              <a:t>25-11-2025</a:t>
             </a:fld>
             <a:endParaRPr lang="en-IN"/>
           </a:p>
@@ -317,7 +315,7 @@
     </p:spTree>
     <p:extLst>
       <p:ext uri="{BB962C8B-B14F-4D97-AF65-F5344CB8AC3E}">
-        <p14:creationId xmlns:p14="http://schemas.microsoft.com/office/powerpoint/2010/main" val="2375262850"/>
+        <p14:creationId xmlns:p14="http://schemas.microsoft.com/office/powerpoint/2010/main" val="2856441189"/>
       </p:ext>
     </p:extLst>
   </p:cSld>
@@ -436,7 +434,7 @@
           <a:p>
             <a:fld id="{06C50271-0AAB-4C94-A81B-1467CBA4DF2C}" type="datetimeFigureOut">
               <a:rPr lang="en-IN" smtClean="0"/>
-              <a:t>24-11-2025</a:t>
+              <a:t>25-11-2025</a:t>
             </a:fld>
             <a:endParaRPr lang="en-IN"/>
           </a:p>
@@ -487,7 +485,7 @@
     </p:spTree>
     <p:extLst>
       <p:ext uri="{BB962C8B-B14F-4D97-AF65-F5344CB8AC3E}">
-        <p14:creationId xmlns:p14="http://schemas.microsoft.com/office/powerpoint/2010/main" val="3087391771"/>
+        <p14:creationId xmlns:p14="http://schemas.microsoft.com/office/powerpoint/2010/main" val="878632276"/>
       </p:ext>
     </p:extLst>
   </p:cSld>
@@ -616,7 +614,7 @@
           <a:p>
             <a:fld id="{06C50271-0AAB-4C94-A81B-1467CBA4DF2C}" type="datetimeFigureOut">
               <a:rPr lang="en-IN" smtClean="0"/>
-              <a:t>24-11-2025</a:t>
+              <a:t>25-11-2025</a:t>
             </a:fld>
             <a:endParaRPr lang="en-IN"/>
           </a:p>
@@ -667,7 +665,7 @@
     </p:spTree>
     <p:extLst>
       <p:ext uri="{BB962C8B-B14F-4D97-AF65-F5344CB8AC3E}">
-        <p14:creationId xmlns:p14="http://schemas.microsoft.com/office/powerpoint/2010/main" val="2885855032"/>
+        <p14:creationId xmlns:p14="http://schemas.microsoft.com/office/powerpoint/2010/main" val="859638982"/>
       </p:ext>
     </p:extLst>
   </p:cSld>
@@ -786,7 +784,7 @@
           <a:p>
             <a:fld id="{06C50271-0AAB-4C94-A81B-1467CBA4DF2C}" type="datetimeFigureOut">
               <a:rPr lang="en-IN" smtClean="0"/>
-              <a:t>24-11-2025</a:t>
+              <a:t>25-11-2025</a:t>
             </a:fld>
             <a:endParaRPr lang="en-IN"/>
           </a:p>
@@ -837,7 +835,7 @@
     </p:spTree>
     <p:extLst>
       <p:ext uri="{BB962C8B-B14F-4D97-AF65-F5344CB8AC3E}">
-        <p14:creationId xmlns:p14="http://schemas.microsoft.com/office/powerpoint/2010/main" val="695479387"/>
+        <p14:creationId xmlns:p14="http://schemas.microsoft.com/office/powerpoint/2010/main" val="3480380512"/>
       </p:ext>
     </p:extLst>
   </p:cSld>
@@ -1032,7 +1030,7 @@
           <a:p>
             <a:fld id="{06C50271-0AAB-4C94-A81B-1467CBA4DF2C}" type="datetimeFigureOut">
               <a:rPr lang="en-IN" smtClean="0"/>
-              <a:t>24-11-2025</a:t>
+              <a:t>25-11-2025</a:t>
             </a:fld>
             <a:endParaRPr lang="en-IN"/>
           </a:p>
@@ -1083,7 +1081,7 @@
     </p:spTree>
     <p:extLst>
       <p:ext uri="{BB962C8B-B14F-4D97-AF65-F5344CB8AC3E}">
-        <p14:creationId xmlns:p14="http://schemas.microsoft.com/office/powerpoint/2010/main" val="1440030019"/>
+        <p14:creationId xmlns:p14="http://schemas.microsoft.com/office/powerpoint/2010/main" val="3198113041"/>
       </p:ext>
     </p:extLst>
   </p:cSld>
@@ -1264,7 +1262,7 @@
           <a:p>
             <a:fld id="{06C50271-0AAB-4C94-A81B-1467CBA4DF2C}" type="datetimeFigureOut">
               <a:rPr lang="en-IN" smtClean="0"/>
-              <a:t>24-11-2025</a:t>
+              <a:t>25-11-2025</a:t>
             </a:fld>
             <a:endParaRPr lang="en-IN"/>
           </a:p>
@@ -1315,7 +1313,7 @@
     </p:spTree>
     <p:extLst>
       <p:ext uri="{BB962C8B-B14F-4D97-AF65-F5344CB8AC3E}">
-        <p14:creationId xmlns:p14="http://schemas.microsoft.com/office/powerpoint/2010/main" val="3165330738"/>
+        <p14:creationId xmlns:p14="http://schemas.microsoft.com/office/powerpoint/2010/main" val="2407652473"/>
       </p:ext>
     </p:extLst>
   </p:cSld>
@@ -1631,7 +1629,7 @@
           <a:p>
             <a:fld id="{06C50271-0AAB-4C94-A81B-1467CBA4DF2C}" type="datetimeFigureOut">
               <a:rPr lang="en-IN" smtClean="0"/>
-              <a:t>24-11-2025</a:t>
+              <a:t>25-11-2025</a:t>
             </a:fld>
             <a:endParaRPr lang="en-IN"/>
           </a:p>
@@ -1682,7 +1680,7 @@
     </p:spTree>
     <p:extLst>
       <p:ext uri="{BB962C8B-B14F-4D97-AF65-F5344CB8AC3E}">
-        <p14:creationId xmlns:p14="http://schemas.microsoft.com/office/powerpoint/2010/main" val="2047985138"/>
+        <p14:creationId xmlns:p14="http://schemas.microsoft.com/office/powerpoint/2010/main" val="3623965336"/>
       </p:ext>
     </p:extLst>
   </p:cSld>
@@ -1749,7 +1747,7 @@
           <a:p>
             <a:fld id="{06C50271-0AAB-4C94-A81B-1467CBA4DF2C}" type="datetimeFigureOut">
               <a:rPr lang="en-IN" smtClean="0"/>
-              <a:t>24-11-2025</a:t>
+              <a:t>25-11-2025</a:t>
             </a:fld>
             <a:endParaRPr lang="en-IN"/>
           </a:p>
@@ -1800,7 +1798,7 @@
     </p:spTree>
     <p:extLst>
       <p:ext uri="{BB962C8B-B14F-4D97-AF65-F5344CB8AC3E}">
-        <p14:creationId xmlns:p14="http://schemas.microsoft.com/office/powerpoint/2010/main" val="517667380"/>
+        <p14:creationId xmlns:p14="http://schemas.microsoft.com/office/powerpoint/2010/main" val="2125079299"/>
       </p:ext>
     </p:extLst>
   </p:cSld>
@@ -1844,7 +1842,7 @@
           <a:p>
             <a:fld id="{06C50271-0AAB-4C94-A81B-1467CBA4DF2C}" type="datetimeFigureOut">
               <a:rPr lang="en-IN" smtClean="0"/>
-              <a:t>24-11-2025</a:t>
+              <a:t>25-11-2025</a:t>
             </a:fld>
             <a:endParaRPr lang="en-IN"/>
           </a:p>
@@ -1895,7 +1893,7 @@
     </p:spTree>
     <p:extLst>
       <p:ext uri="{BB962C8B-B14F-4D97-AF65-F5344CB8AC3E}">
-        <p14:creationId xmlns:p14="http://schemas.microsoft.com/office/powerpoint/2010/main" val="844203661"/>
+        <p14:creationId xmlns:p14="http://schemas.microsoft.com/office/powerpoint/2010/main" val="1416340412"/>
       </p:ext>
     </p:extLst>
   </p:cSld>
@@ -2121,7 +2119,7 @@
           <a:p>
             <a:fld id="{06C50271-0AAB-4C94-A81B-1467CBA4DF2C}" type="datetimeFigureOut">
               <a:rPr lang="en-IN" smtClean="0"/>
-              <a:t>24-11-2025</a:t>
+              <a:t>25-11-2025</a:t>
             </a:fld>
             <a:endParaRPr lang="en-IN"/>
           </a:p>
@@ -2172,7 +2170,7 @@
     </p:spTree>
     <p:extLst>
       <p:ext uri="{BB962C8B-B14F-4D97-AF65-F5344CB8AC3E}">
-        <p14:creationId xmlns:p14="http://schemas.microsoft.com/office/powerpoint/2010/main" val="1352878440"/>
+        <p14:creationId xmlns:p14="http://schemas.microsoft.com/office/powerpoint/2010/main" val="148364622"/>
       </p:ext>
     </p:extLst>
   </p:cSld>
@@ -2378,7 +2376,7 @@
           <a:p>
             <a:fld id="{06C50271-0AAB-4C94-A81B-1467CBA4DF2C}" type="datetimeFigureOut">
               <a:rPr lang="en-IN" smtClean="0"/>
-              <a:t>24-11-2025</a:t>
+              <a:t>25-11-2025</a:t>
             </a:fld>
             <a:endParaRPr lang="en-IN"/>
           </a:p>
@@ -2429,7 +2427,7 @@
     </p:spTree>
     <p:extLst>
       <p:ext uri="{BB962C8B-B14F-4D97-AF65-F5344CB8AC3E}">
-        <p14:creationId xmlns:p14="http://schemas.microsoft.com/office/powerpoint/2010/main" val="980080904"/>
+        <p14:creationId xmlns:p14="http://schemas.microsoft.com/office/powerpoint/2010/main" val="694969206"/>
       </p:ext>
     </p:extLst>
   </p:cSld>
@@ -2591,7 +2589,7 @@
           <a:p>
             <a:fld id="{06C50271-0AAB-4C94-A81B-1467CBA4DF2C}" type="datetimeFigureOut">
               <a:rPr lang="en-IN" smtClean="0"/>
-              <a:t>24-11-2025</a:t>
+              <a:t>25-11-2025</a:t>
             </a:fld>
             <a:endParaRPr lang="en-IN"/>
           </a:p>
@@ -2678,23 +2676,23 @@
     </p:spTree>
     <p:extLst>
       <p:ext uri="{BB962C8B-B14F-4D97-AF65-F5344CB8AC3E}">
-        <p14:creationId xmlns:p14="http://schemas.microsoft.com/office/powerpoint/2010/main" val="1560432221"/>
+        <p14:creationId xmlns:p14="http://schemas.microsoft.com/office/powerpoint/2010/main" val="3620932083"/>
       </p:ext>
     </p:extLst>
   </p:cSld>
   <p:clrMap bg1="dk1" tx1="lt1" bg2="dk2" tx2="lt2" accent1="accent1" accent2="accent2" accent3="accent3" accent4="accent4" accent5="accent5" accent6="accent6" hlink="hlink" folHlink="folHlink"/>
   <p:sldLayoutIdLst>
-    <p:sldLayoutId id="2147483661" r:id="rId1"/>
-    <p:sldLayoutId id="2147483662" r:id="rId2"/>
-    <p:sldLayoutId id="2147483663" r:id="rId3"/>
-    <p:sldLayoutId id="2147483664" r:id="rId4"/>
-    <p:sldLayoutId id="2147483665" r:id="rId5"/>
-    <p:sldLayoutId id="2147483666" r:id="rId6"/>
-    <p:sldLayoutId id="2147483667" r:id="rId7"/>
-    <p:sldLayoutId id="2147483668" r:id="rId8"/>
-    <p:sldLayoutId id="2147483669" r:id="rId9"/>
-    <p:sldLayoutId id="2147483670" r:id="rId10"/>
-    <p:sldLayoutId id="2147483671" r:id="rId11"/>
+    <p:sldLayoutId id="2147483685" r:id="rId1"/>
+    <p:sldLayoutId id="2147483686" r:id="rId2"/>
+    <p:sldLayoutId id="2147483687" r:id="rId3"/>
+    <p:sldLayoutId id="2147483688" r:id="rId4"/>
+    <p:sldLayoutId id="2147483689" r:id="rId5"/>
+    <p:sldLayoutId id="2147483690" r:id="rId6"/>
+    <p:sldLayoutId id="2147483691" r:id="rId7"/>
+    <p:sldLayoutId id="2147483692" r:id="rId8"/>
+    <p:sldLayoutId id="2147483693" r:id="rId9"/>
+    <p:sldLayoutId id="2147483694" r:id="rId10"/>
+    <p:sldLayoutId id="2147483695" r:id="rId11"/>
   </p:sldLayoutIdLst>
   <p:txStyles>
     <p:titleStyle>
@@ -6357,7 +6355,7 @@
           <p:cNvPr id="2" name="Title 1">
             <a:extLst>
               <a:ext uri="{FF2B5EF4-FFF2-40B4-BE49-F238E27FC236}">
-                <a16:creationId xmlns:a16="http://schemas.microsoft.com/office/drawing/2014/main" id="{A07441FB-2BBC-E75D-00B9-04E1018EC74D}"/>
+                <a16:creationId xmlns:a16="http://schemas.microsoft.com/office/drawing/2014/main" id="{C1A8CBE5-B539-8576-CAAA-3D951315A3BB}"/>
               </a:ext>
             </a:extLst>
           </p:cNvPr>
@@ -6368,30 +6366,88 @@
             <p:ph type="title"/>
           </p:nvPr>
         </p:nvSpPr>
-        <p:spPr>
-          <a:xfrm>
-            <a:off x="2069690" y="2860406"/>
-            <a:ext cx="8052620" cy="1137188"/>
-          </a:xfrm>
-        </p:spPr>
+        <p:spPr/>
+        <p:txBody>
+          <a:bodyPr/>
+          <a:lstStyle/>
+          <a:p>
+            <a:pPr algn="ctr"/>
+            <a:r>
+              <a:rPr lang="en-US" b="1"/>
+              <a:t>GHT vs K-d Trees</a:t>
+            </a:r>
+            <a:endParaRPr lang="en-IN" b="1"/>
+          </a:p>
+        </p:txBody>
+      </p:sp>
+      <p:sp>
+        <p:nvSpPr>
+          <p:cNvPr id="3" name="Content Placeholder 2">
+            <a:extLst>
+              <a:ext uri="{FF2B5EF4-FFF2-40B4-BE49-F238E27FC236}">
+                <a16:creationId xmlns:a16="http://schemas.microsoft.com/office/drawing/2014/main" id="{FCAD6EF6-A6D1-0324-13AD-5A78B12AD5A1}"/>
+              </a:ext>
+            </a:extLst>
+          </p:cNvPr>
+          <p:cNvSpPr>
+            <a:spLocks noGrp="1"/>
+          </p:cNvSpPr>
+          <p:nvPr>
+            <p:ph idx="1"/>
+          </p:nvPr>
+        </p:nvSpPr>
+        <p:spPr/>
         <p:txBody>
           <a:bodyPr>
-            <a:noAutofit/>
+            <a:normAutofit/>
           </a:bodyPr>
           <a:lstStyle/>
           <a:p>
             <a:r>
-              <a:rPr lang="en-US" sz="6600" b="1"/>
-              <a:t>BATTLE OF THE TREES</a:t>
-            </a:r>
-            <a:endParaRPr lang="en-IN" sz="6600" b="1"/>
+              <a:rPr lang="en-US"/>
+              <a:t>K-d trees rely on </a:t>
+            </a:r>
+            <a:r>
+              <a:rPr lang="en-US" b="1"/>
+              <a:t>coordinate projections</a:t>
+            </a:r>
+            <a:r>
+              <a:rPr lang="en-US"/>
+              <a:t>, which become meaningless in high dimensions.</a:t>
+            </a:r>
+          </a:p>
+          <a:p>
+            <a:r>
+              <a:rPr lang="en-US"/>
+              <a:t>GHTs use </a:t>
+            </a:r>
+            <a:r>
+              <a:rPr lang="en-US" b="1"/>
+              <a:t>relative distances</a:t>
+            </a:r>
+            <a:r>
+              <a:rPr lang="en-US"/>
+              <a:t>, where triangle inequality still helps to prune.</a:t>
+            </a:r>
+          </a:p>
+          <a:p>
+            <a:r>
+              <a:rPr lang="en-US"/>
+              <a:t>K-d trees work on vector spaces, while GHT’s can be used on more variety of data, as long as a metric is defined.</a:t>
+            </a:r>
+          </a:p>
+          <a:p>
+            <a:r>
+              <a:rPr lang="en-US"/>
+              <a:t>K-d trees are strictly dependent on dimensionality. GHT’s can avoid that by defining a proper metric.</a:t>
+            </a:r>
           </a:p>
         </p:txBody>
       </p:sp>
     </p:spTree>
     <p:extLst>
       <p:ext uri="{BB962C8B-B14F-4D97-AF65-F5344CB8AC3E}">
-        <p14:creationId xmlns:p14="http://schemas.microsoft.com/office/powerpoint/2010/main" val="3906488976"/>
+        <p14:creationId xmlns:p14="http://schemas.microsoft.com/office/powerpoint/2010/main" val="594384656"/>
       </p:ext>
     </p:extLst>
   </p:cSld>
@@ -6423,130 +6479,6 @@
           <p:cNvPr id="2" name="Title 1">
             <a:extLst>
               <a:ext uri="{FF2B5EF4-FFF2-40B4-BE49-F238E27FC236}">
-                <a16:creationId xmlns:a16="http://schemas.microsoft.com/office/drawing/2014/main" id="{C1A8CBE5-B539-8576-CAAA-3D951315A3BB}"/>
-              </a:ext>
-            </a:extLst>
-          </p:cNvPr>
-          <p:cNvSpPr>
-            <a:spLocks noGrp="1"/>
-          </p:cNvSpPr>
-          <p:nvPr>
-            <p:ph type="title"/>
-          </p:nvPr>
-        </p:nvSpPr>
-        <p:spPr/>
-        <p:txBody>
-          <a:bodyPr/>
-          <a:lstStyle/>
-          <a:p>
-            <a:pPr algn="ctr"/>
-            <a:r>
-              <a:rPr lang="en-US" b="1"/>
-              <a:t>GHT vs K-d Trees</a:t>
-            </a:r>
-            <a:endParaRPr lang="en-IN" b="1"/>
-          </a:p>
-        </p:txBody>
-      </p:sp>
-      <p:sp>
-        <p:nvSpPr>
-          <p:cNvPr id="3" name="Content Placeholder 2">
-            <a:extLst>
-              <a:ext uri="{FF2B5EF4-FFF2-40B4-BE49-F238E27FC236}">
-                <a16:creationId xmlns:a16="http://schemas.microsoft.com/office/drawing/2014/main" id="{FCAD6EF6-A6D1-0324-13AD-5A78B12AD5A1}"/>
-              </a:ext>
-            </a:extLst>
-          </p:cNvPr>
-          <p:cNvSpPr>
-            <a:spLocks noGrp="1"/>
-          </p:cNvSpPr>
-          <p:nvPr>
-            <p:ph idx="1"/>
-          </p:nvPr>
-        </p:nvSpPr>
-        <p:spPr/>
-        <p:txBody>
-          <a:bodyPr>
-            <a:normAutofit/>
-          </a:bodyPr>
-          <a:lstStyle/>
-          <a:p>
-            <a:r>
-              <a:rPr lang="en-US"/>
-              <a:t>K-d trees rely on </a:t>
-            </a:r>
-            <a:r>
-              <a:rPr lang="en-US" b="1"/>
-              <a:t>coordinate projections</a:t>
-            </a:r>
-            <a:r>
-              <a:rPr lang="en-US"/>
-              <a:t>, which become meaningless in high dimensions.</a:t>
-            </a:r>
-          </a:p>
-          <a:p>
-            <a:r>
-              <a:rPr lang="en-US"/>
-              <a:t>GHTs use </a:t>
-            </a:r>
-            <a:r>
-              <a:rPr lang="en-US" b="1"/>
-              <a:t>relative distances</a:t>
-            </a:r>
-            <a:r>
-              <a:rPr lang="en-US"/>
-              <a:t>, where triangle inequality still helpsto prune.</a:t>
-            </a:r>
-          </a:p>
-          <a:p>
-            <a:r>
-              <a:rPr lang="en-US"/>
-              <a:t>K-d trees work on vector spaces, while GHT’s can be used on more variety of data, as long as a metric is defined.</a:t>
-            </a:r>
-          </a:p>
-          <a:p>
-            <a:r>
-              <a:rPr lang="en-US"/>
-              <a:t>K-d trees are strictly dependent on dimensionality. GHT’s can avoid that by defining a proper metric.</a:t>
-            </a:r>
-          </a:p>
-        </p:txBody>
-      </p:sp>
-    </p:spTree>
-    <p:extLst>
-      <p:ext uri="{BB962C8B-B14F-4D97-AF65-F5344CB8AC3E}">
-        <p14:creationId xmlns:p14="http://schemas.microsoft.com/office/powerpoint/2010/main" val="594384656"/>
-      </p:ext>
-    </p:extLst>
-  </p:cSld>
-  <p:clrMapOvr>
-    <a:masterClrMapping/>
-  </p:clrMapOvr>
-</p:sld>
-</file>
-
-<file path=ppt/slides/slide22.xml><?xml version="1.0" encoding="utf-8"?>
-<p:sld xmlns:a="http://schemas.openxmlformats.org/drawingml/2006/main" xmlns:r="http://schemas.openxmlformats.org/officeDocument/2006/relationships" xmlns:p="http://schemas.openxmlformats.org/presentationml/2006/main">
-  <p:cSld>
-    <p:spTree>
-      <p:nvGrpSpPr>
-        <p:cNvPr id="1" name=""/>
-        <p:cNvGrpSpPr/>
-        <p:nvPr/>
-      </p:nvGrpSpPr>
-      <p:grpSpPr>
-        <a:xfrm>
-          <a:off x="0" y="0"/>
-          <a:ext cx="0" cy="0"/>
-          <a:chOff x="0" y="0"/>
-          <a:chExt cx="0" cy="0"/>
-        </a:xfrm>
-      </p:grpSpPr>
-      <p:sp>
-        <p:nvSpPr>
-          <p:cNvPr id="2" name="Title 1">
-            <a:extLst>
-              <a:ext uri="{FF2B5EF4-FFF2-40B4-BE49-F238E27FC236}">
                 <a16:creationId xmlns:a16="http://schemas.microsoft.com/office/drawing/2014/main" id="{0B30B5A8-9844-9E8D-4755-8A31FEE74A4B}"/>
               </a:ext>
             </a:extLst>
@@ -6632,115 +6564,7 @@
 </p:sld>
 </file>
 
-<file path=ppt/slides/slide23.xml><?xml version="1.0" encoding="utf-8"?>
-<p:sld xmlns:a="http://schemas.openxmlformats.org/drawingml/2006/main" xmlns:r="http://schemas.openxmlformats.org/officeDocument/2006/relationships" xmlns:p="http://schemas.openxmlformats.org/presentationml/2006/main">
-  <p:cSld>
-    <p:spTree>
-      <p:nvGrpSpPr>
-        <p:cNvPr id="1" name=""/>
-        <p:cNvGrpSpPr/>
-        <p:nvPr/>
-      </p:nvGrpSpPr>
-      <p:grpSpPr>
-        <a:xfrm>
-          <a:off x="0" y="0"/>
-          <a:ext cx="0" cy="0"/>
-          <a:chOff x="0" y="0"/>
-          <a:chExt cx="0" cy="0"/>
-        </a:xfrm>
-      </p:grpSpPr>
-      <p:sp>
-        <p:nvSpPr>
-          <p:cNvPr id="2" name="Title 1">
-            <a:extLst>
-              <a:ext uri="{FF2B5EF4-FFF2-40B4-BE49-F238E27FC236}">
-                <a16:creationId xmlns:a16="http://schemas.microsoft.com/office/drawing/2014/main" id="{68A112BD-466B-89A4-9A16-F01159F5C03E}"/>
-              </a:ext>
-            </a:extLst>
-          </p:cNvPr>
-          <p:cNvSpPr>
-            <a:spLocks noGrp="1"/>
-          </p:cNvSpPr>
-          <p:nvPr>
-            <p:ph type="title"/>
-          </p:nvPr>
-        </p:nvSpPr>
-        <p:spPr/>
-        <p:txBody>
-          <a:bodyPr/>
-          <a:lstStyle/>
-          <a:p>
-            <a:pPr algn="ctr"/>
-            <a:r>
-              <a:rPr lang="en-US" b="1"/>
-              <a:t>GHT VS VANTAGE POINT TREES</a:t>
-            </a:r>
-            <a:endParaRPr lang="en-IN" b="1"/>
-          </a:p>
-        </p:txBody>
-      </p:sp>
-      <p:sp>
-        <p:nvSpPr>
-          <p:cNvPr id="3" name="Content Placeholder 2">
-            <a:extLst>
-              <a:ext uri="{FF2B5EF4-FFF2-40B4-BE49-F238E27FC236}">
-                <a16:creationId xmlns:a16="http://schemas.microsoft.com/office/drawing/2014/main" id="{67F6836E-8DD1-7E80-CA3E-05BFAC414DB7}"/>
-              </a:ext>
-            </a:extLst>
-          </p:cNvPr>
-          <p:cNvSpPr>
-            <a:spLocks noGrp="1"/>
-          </p:cNvSpPr>
-          <p:nvPr>
-            <p:ph idx="1"/>
-          </p:nvPr>
-        </p:nvSpPr>
-        <p:spPr>
-          <a:xfrm>
-            <a:off x="838200" y="2506662"/>
-            <a:ext cx="10515600" cy="4351338"/>
-          </a:xfrm>
-        </p:spPr>
-        <p:txBody>
-          <a:bodyPr/>
-          <a:lstStyle/>
-          <a:p>
-            <a:r>
-              <a:rPr lang="en-US"/>
-              <a:t>VPT’s fail when data has multiple clusters.</a:t>
-            </a:r>
-          </a:p>
-          <a:p>
-            <a:r>
-              <a:rPr lang="en-US"/>
-              <a:t>VPT’s do not work well on elongated datasets.</a:t>
-            </a:r>
-          </a:p>
-          <a:p>
-            <a:r>
-              <a:rPr lang="en-US"/>
-              <a:t>Main problem VPT’s suffer with – spherical geometry</a:t>
-            </a:r>
-          </a:p>
-          <a:p>
-            <a:endParaRPr lang="en-IN"/>
-          </a:p>
-        </p:txBody>
-      </p:sp>
-    </p:spTree>
-    <p:extLst>
-      <p:ext uri="{BB962C8B-B14F-4D97-AF65-F5344CB8AC3E}">
-        <p14:creationId xmlns:p14="http://schemas.microsoft.com/office/powerpoint/2010/main" val="2177684466"/>
-      </p:ext>
-    </p:extLst>
-  </p:cSld>
-  <p:clrMapOvr>
-    <a:masterClrMapping/>
-  </p:clrMapOvr>
-</p:sld>
-</file>
-
-<file path=ppt/slides/slide24.xml><?xml version="1.0" encoding="utf-8"?>
+<file path=ppt/slides/slide22.xml><?xml version="1.0" encoding="utf-8"?>
 <p:sld xmlns:a="http://schemas.openxmlformats.org/drawingml/2006/main" xmlns:r="http://schemas.openxmlformats.org/officeDocument/2006/relationships" xmlns:p="http://schemas.openxmlformats.org/presentationml/2006/main">
   <p:cSld>
     <p:spTree>
